--- a/smartpark/report_assets/SmartPark_Slides.pptx
+++ b/smartpark/report_assets/SmartPark_Slides.pptx
@@ -21,6 +21,7 @@
     <p:sldId id="269" r:id="rId20"/>
     <p:sldId id="270" r:id="rId21"/>
     <p:sldId id="271" r:id="rId22"/>
+    <p:sldId id="272" r:id="rId23"/>
   </p:sldIdLst>
   <p:sldSz cx="12188952" cy="6858000" type="screen4x3"/>
   <p:notesSz cx="6858000" cy="9144000"/>
@@ -4772,7 +4773,7 @@
                 </a:solidFill>
                 <a:latin typeface="Calibri"/>
               </a:rPr>
-              <a:t>Discussion &amp; Limitations</a:t>
+              <a:t>Real-Photo Generalization Test</a:t>
             </a:r>
           </a:p>
         </p:txBody>
@@ -4807,21 +4808,45 @@
                 </a:solidFill>
                 <a:latin typeface="Calibri"/>
               </a:rPr>
-              <a:t>Honest accounting</a:t>
-            </a:r>
-          </a:p>
-        </p:txBody>
-      </p:sp>
-      <p:sp>
-        <p:nvSpPr>
-          <p:cNvPr id="5" name="TextBox 4"/>
+              <a:t>Qualitative — trained only on synthetic data, run on real CNRPark-EXT photos</a:t>
+            </a:r>
+          </a:p>
+        </p:txBody>
+      </p:sp>
+      <p:pic>
+        <p:nvPicPr>
+          <p:cNvPr id="5" name="Picture 4" descr="example_2.jpg"/>
+          <p:cNvPicPr>
+            <a:picLocks noChangeAspect="1"/>
+          </p:cNvPicPr>
+          <p:nvPr/>
+        </p:nvPicPr>
+        <p:blipFill>
+          <a:blip r:embed="rId2"/>
+          <a:stretch>
+            <a:fillRect/>
+          </a:stretch>
+        </p:blipFill>
+        <p:spPr>
+          <a:xfrm>
+            <a:off x="1097280" y="1668780"/>
+            <a:ext cx="6035040" cy="4526280"/>
+          </a:xfrm>
+          <a:prstGeom prst="rect">
+            <a:avLst/>
+          </a:prstGeom>
+        </p:spPr>
+      </p:pic>
+      <p:sp>
+        <p:nvSpPr>
+          <p:cNvPr id="6" name="TextBox 5"/>
           <p:cNvSpPr txBox="1"/>
           <p:nvPr/>
         </p:nvSpPr>
         <p:spPr>
           <a:xfrm>
-            <a:off x="640080" y="1737360"/>
-            <a:ext cx="10698480" cy="4389120"/>
+            <a:off x="7406640" y="1828800"/>
+            <a:ext cx="4206240" cy="4114800"/>
           </a:xfrm>
           <a:prstGeom prst="rect">
             <a:avLst/>
@@ -4838,14 +4863,14 @@
               <a:spcAft>
                 <a:spcPts val="800"/>
               </a:spcAft>
-              <a:defRPr sz="1700">
+              <a:defRPr sz="1400">
                 <a:solidFill>
                   <a:srgbClr val="F4F4F5"/>
                 </a:solidFill>
               </a:defRPr>
             </a:pPr>
             <a:r>
-              <a:t>•  Worked: staged synthetic-first build let the whole pipeline be validated cheaply before real data</a:t>
+              <a:t>•  115 real photos tested, no painted lines, steep real camera angle</a:t>
             </a:r>
           </a:p>
           <a:p>
@@ -4853,14 +4878,14 @@
               <a:spcAft>
                 <a:spcPts val="800"/>
               </a:spcAft>
-              <a:defRPr sz="1700">
+              <a:defRPr sz="1400">
                 <a:solidFill>
                   <a:srgbClr val="F4F4F5"/>
                 </a:solidFill>
               </a:defRPr>
             </a:pPr>
             <a:r>
-              <a:t>•  Had to be revisited: the original classifier-only version didn't satisfy Object Detection — only caught by auditing against the rubric, requiring a genuine architecture change in Sprint 4</a:t>
+              <a:t>•  Boxes loosely cluster near real cars — some transferable signal</a:t>
             </a:r>
           </a:p>
           <a:p>
@@ -4868,14 +4893,14 @@
               <a:spcAft>
                 <a:spcPts val="800"/>
               </a:spcAft>
-              <a:defRPr sz="1700">
+              <a:defRPr sz="1400">
                 <a:solidFill>
                   <a:srgbClr val="F4F4F5"/>
                 </a:solidFill>
               </a:defRPr>
             </a:pPr>
             <a:r>
-              <a:t>•  Detector is validated on synthetic data only — real photos (shadows, lighting, dense packing) remain the main open validation gap; the classifier's real-PKLot result doesn't cover the detector</a:t>
+              <a:t>•  Misses most vehicles; box shapes imprecise</a:t>
             </a:r>
           </a:p>
           <a:p>
@@ -4883,14 +4908,29 @@
               <a:spcAft>
                 <a:spcPts val="800"/>
               </a:spcAft>
-              <a:defRPr sz="1700">
+              <a:defRPr sz="1400">
                 <a:solidFill>
                   <a:srgbClr val="F4F4F5"/>
                 </a:solidFill>
               </a:defRPr>
             </a:pPr>
             <a:r>
-              <a:t>•  Low-contrast cars (e.g. gray-on-gray) are the concentrated failure mode, in both the new detector and the original classic-CV heuristic — the clear next target</a:t>
+              <a:t>•  empty_spot almost never fires — no painted bays in this domain</a:t>
+            </a:r>
+          </a:p>
+          <a:p>
+            <a:pPr>
+              <a:spcAft>
+                <a:spcPts val="800"/>
+              </a:spcAft>
+              <a:defRPr sz="1400">
+                <a:solidFill>
+                  <a:srgbClr val="F4F4F5"/>
+                </a:solidFill>
+              </a:defRPr>
+            </a:pPr>
+            <a:r>
+              <a:t>•  Matches this project's earlier classifier result: 40% on the same cross-domain test</a:t>
             </a:r>
           </a:p>
         </p:txBody>
@@ -4987,7 +5027,7 @@
                 </a:solidFill>
                 <a:latin typeface="Calibri"/>
               </a:rPr>
-              <a:t>Conclusion</a:t>
+              <a:t>Discussion &amp; Limitations</a:t>
             </a:r>
           </a:p>
         </p:txBody>
@@ -5000,8 +5040,8 @@
         </p:nvSpPr>
         <p:spPr>
           <a:xfrm>
-            <a:off x="731520" y="2011680"/>
-            <a:ext cx="10698480" cy="3657600"/>
+            <a:off x="548640" y="960120"/>
+            <a:ext cx="10972800" cy="457200"/>
           </a:xfrm>
           <a:prstGeom prst="rect">
             <a:avLst/>
@@ -5016,13 +5056,96 @@
           <a:p>
             <a:pPr algn="l"/>
             <a:r>
-              <a:rPr sz="2000" b="0">
+              <a:rPr sz="1500" b="0">
+                <a:solidFill>
+                  <a:srgbClr val="A1A1AA"/>
+                </a:solidFill>
+                <a:latin typeface="Calibri"/>
+              </a:rPr>
+              <a:t>Honest accounting</a:t>
+            </a:r>
+          </a:p>
+        </p:txBody>
+      </p:sp>
+      <p:sp>
+        <p:nvSpPr>
+          <p:cNvPr id="5" name="TextBox 4"/>
+          <p:cNvSpPr txBox="1"/>
+          <p:nvPr/>
+        </p:nvSpPr>
+        <p:spPr>
+          <a:xfrm>
+            <a:off x="640080" y="1737360"/>
+            <a:ext cx="10698480" cy="4389120"/>
+          </a:xfrm>
+          <a:prstGeom prst="rect">
+            <a:avLst/>
+          </a:prstGeom>
+          <a:noFill/>
+        </p:spPr>
+        <p:txBody>
+          <a:bodyPr wrap="square">
+            <a:spAutoFit/>
+          </a:bodyPr>
+          <a:lstStyle/>
+          <a:p>
+            <a:pPr>
+              <a:spcAft>
+                <a:spcPts val="800"/>
+              </a:spcAft>
+              <a:defRPr sz="1700">
                 <a:solidFill>
                   <a:srgbClr val="F4F4F5"/>
                 </a:solidFill>
-                <a:latin typeface="Calibri"/>
-              </a:rPr>
-              <a:t>A from-scratch object detector for two classes (empty_spot / occupied_spot), 98.71% mAP@0.5, beating both a majority-class baseline (53.3%) and this project's own earlier classic-CV heuristic (82.7%). Served live through a REST API and browser demo, alongside a real-data-validated occupancy classifier for calibrated cameras. Main next step: validate the detector on real, non-synthetic photographs.</a:t>
+              </a:defRPr>
+            </a:pPr>
+            <a:r>
+              <a:t>•  Worked: staged synthetic-first build let the whole pipeline be validated cheaply before real data</a:t>
+            </a:r>
+          </a:p>
+          <a:p>
+            <a:pPr>
+              <a:spcAft>
+                <a:spcPts val="800"/>
+              </a:spcAft>
+              <a:defRPr sz="1700">
+                <a:solidFill>
+                  <a:srgbClr val="F4F4F5"/>
+                </a:solidFill>
+              </a:defRPr>
+            </a:pPr>
+            <a:r>
+              <a:t>•  Had to be revisited: the original classifier-only version didn't satisfy Object Detection — only caught by auditing against the rubric, requiring a genuine architecture change in Sprint 4</a:t>
+            </a:r>
+          </a:p>
+          <a:p>
+            <a:pPr>
+              <a:spcAft>
+                <a:spcPts val="800"/>
+              </a:spcAft>
+              <a:defRPr sz="1700">
+                <a:solidFill>
+                  <a:srgbClr val="F4F4F5"/>
+                </a:solidFill>
+              </a:defRPr>
+            </a:pPr>
+            <a:r>
+              <a:t>•  Tested on real photos (CNRPark-EXT): coarse signal transfers, precise localization does not — a real, measured domain gap, not an unexamined unknown</a:t>
+            </a:r>
+          </a:p>
+          <a:p>
+            <a:pPr>
+              <a:spcAft>
+                <a:spcPts val="800"/>
+              </a:spcAft>
+              <a:defRPr sz="1700">
+                <a:solidFill>
+                  <a:srgbClr val="F4F4F5"/>
+                </a:solidFill>
+              </a:defRPr>
+            </a:pPr>
+            <a:r>
+              <a:t>•  Low-contrast cars (e.g. gray-on-gray) are a concentrated failure mode, in both the new detector and the original classic-CV heuristic — the clear next target</a:t>
             </a:r>
           </a:p>
         </p:txBody>
@@ -5036,6 +5159,138 @@
 </file>
 
 <file path=ppt/slides/slide16.xml><?xml version="1.0" encoding="utf-8"?>
+<p:sld xmlns:a="http://schemas.openxmlformats.org/drawingml/2006/main" xmlns:p="http://schemas.openxmlformats.org/presentationml/2006/main" xmlns:r="http://schemas.openxmlformats.org/officeDocument/2006/relationships">
+  <p:cSld>
+    <p:spTree>
+      <p:nvGrpSpPr>
+        <p:cNvPr id="1" name=""/>
+        <p:cNvGrpSpPr/>
+        <p:nvPr/>
+      </p:nvGrpSpPr>
+      <p:grpSpPr/>
+      <p:sp>
+        <p:nvSpPr>
+          <p:cNvPr id="2" name="Rectangle 1"/>
+          <p:cNvSpPr/>
+          <p:nvPr/>
+        </p:nvSpPr>
+        <p:spPr>
+          <a:xfrm>
+            <a:off x="0" y="0"/>
+            <a:ext cx="12188952" cy="6858000"/>
+          </a:xfrm>
+          <a:prstGeom prst="rect">
+            <a:avLst/>
+          </a:prstGeom>
+          <a:solidFill>
+            <a:srgbClr val="18181B"/>
+          </a:solidFill>
+          <a:ln>
+            <a:noFill/>
+          </a:ln>
+          <a:effectLst/>
+        </p:spPr>
+        <p:style>
+          <a:lnRef idx="1">
+            <a:schemeClr val="accent1"/>
+          </a:lnRef>
+          <a:fillRef idx="3">
+            <a:schemeClr val="accent1"/>
+          </a:fillRef>
+          <a:effectRef idx="2">
+            <a:schemeClr val="accent1"/>
+          </a:effectRef>
+          <a:fontRef idx="minor">
+            <a:schemeClr val="lt1"/>
+          </a:fontRef>
+        </p:style>
+        <p:txBody>
+          <a:bodyPr rtlCol="0" anchor="ctr"/>
+          <a:lstStyle/>
+          <a:p>
+            <a:pPr algn="ctr"/>
+          </a:p>
+        </p:txBody>
+      </p:sp>
+      <p:sp>
+        <p:nvSpPr>
+          <p:cNvPr id="3" name="TextBox 2"/>
+          <p:cNvSpPr txBox="1"/>
+          <p:nvPr/>
+        </p:nvSpPr>
+        <p:spPr>
+          <a:xfrm>
+            <a:off x="548640" y="320040"/>
+            <a:ext cx="10972800" cy="731520"/>
+          </a:xfrm>
+          <a:prstGeom prst="rect">
+            <a:avLst/>
+          </a:prstGeom>
+          <a:noFill/>
+        </p:spPr>
+        <p:txBody>
+          <a:bodyPr wrap="square">
+            <a:spAutoFit/>
+          </a:bodyPr>
+          <a:lstStyle/>
+          <a:p>
+            <a:pPr algn="l"/>
+            <a:r>
+              <a:rPr sz="3000" b="1">
+                <a:solidFill>
+                  <a:srgbClr val="6B8AFF"/>
+                </a:solidFill>
+                <a:latin typeface="Calibri"/>
+              </a:rPr>
+              <a:t>Conclusion</a:t>
+            </a:r>
+          </a:p>
+        </p:txBody>
+      </p:sp>
+      <p:sp>
+        <p:nvSpPr>
+          <p:cNvPr id="4" name="TextBox 3"/>
+          <p:cNvSpPr txBox="1"/>
+          <p:nvPr/>
+        </p:nvSpPr>
+        <p:spPr>
+          <a:xfrm>
+            <a:off x="731520" y="2011680"/>
+            <a:ext cx="10698480" cy="3657600"/>
+          </a:xfrm>
+          <a:prstGeom prst="rect">
+            <a:avLst/>
+          </a:prstGeom>
+          <a:noFill/>
+        </p:spPr>
+        <p:txBody>
+          <a:bodyPr wrap="square">
+            <a:spAutoFit/>
+          </a:bodyPr>
+          <a:lstStyle/>
+          <a:p>
+            <a:pPr algn="l"/>
+            <a:r>
+              <a:rPr sz="1900" b="0">
+                <a:solidFill>
+                  <a:srgbClr val="F4F4F5"/>
+                </a:solidFill>
+                <a:latin typeface="Calibri"/>
+              </a:rPr>
+              <a:t>A from-scratch object detector for two classes (empty_spot / occupied_spot), 98.71% mAP@0.5, beating both a majority-class baseline (53.3%) and this project's own earlier classic-CV heuristic (82.7%). Served live through a REST API and browser demo, alongside a real-data-validated occupancy classifier for calibrated cameras. A real-photo test shows the next step clearly: fine-tune on the target camera's actual images before deployment.</a:t>
+            </a:r>
+          </a:p>
+        </p:txBody>
+      </p:sp>
+    </p:spTree>
+  </p:cSld>
+  <p:clrMapOvr>
+    <a:masterClrMapping/>
+  </p:clrMapOvr>
+</p:sld>
+</file>
+
+<file path=ppt/slides/slide17.xml><?xml version="1.0" encoding="utf-8"?>
 <p:sld xmlns:a="http://schemas.openxmlformats.org/drawingml/2006/main" xmlns:p="http://schemas.openxmlformats.org/presentationml/2006/main" xmlns:r="http://schemas.openxmlformats.org/officeDocument/2006/relationships">
   <p:cSld>
     <p:spTree>

--- a/smartpark/report_assets/SmartPark_Slides.pptx
+++ b/smartpark/report_assets/SmartPark_Slides.pptx
@@ -22,6 +22,8 @@
     <p:sldId id="270" r:id="rId21"/>
     <p:sldId id="271" r:id="rId22"/>
     <p:sldId id="272" r:id="rId23"/>
+    <p:sldId id="273" r:id="rId24"/>
+    <p:sldId id="274" r:id="rId25"/>
   </p:sldIdLst>
   <p:sldSz cx="12188952" cy="6858000" type="screen4x3"/>
   <p:notesSz cx="6858000" cy="9144000"/>
@@ -4490,7 +4492,7 @@
               </a:defRPr>
             </a:pPr>
             <a:r>
-              <a:t>•  Trained on real PKLot data (1,242 photos, 70,684 labeled spaces) → 97.04% validation accuracy, consistent with published PKLot/CNRPark-EXT results</a:t>
+              <a:t>•  Trained on real PKLot data (1,242 photos, 70,684 labeled spaces) → 98.69% validation accuracy, consistent with (slightly ahead of) published PKLot/CNRPark-EXT results</a:t>
             </a:r>
           </a:p>
           <a:p>
@@ -4505,7 +4507,7 @@
               </a:defRPr>
             </a:pPr>
             <a:r>
-              <a:t>•  Environment note: that checkpoint needs Keras-version reconciliation to reload in this environment; 97.04% is the genuine, previously-recorded result</a:t>
+              <a:t>•  Same real PKLot export also used to fine-tune the object detector (next slide)</a:t>
             </a:r>
           </a:p>
           <a:p>
@@ -4773,7 +4775,7 @@
                 </a:solidFill>
                 <a:latin typeface="Calibri"/>
               </a:rPr>
-              <a:t>Real-Photo Generalization Test</a:t>
+              <a:t>Zero-Shot Cross-Domain Test (CNRPark-EXT)</a:t>
             </a:r>
           </a:p>
         </p:txBody>
@@ -4808,7 +4810,7 @@
                 </a:solidFill>
                 <a:latin typeface="Calibri"/>
               </a:rPr>
-              <a:t>Qualitative — trained only on synthetic data, run on real CNRPark-EXT photos</a:t>
+              <a:t>A totally unfamiliar camera angle and marking style</a:t>
             </a:r>
           </a:p>
         </p:txBody>
@@ -4863,7 +4865,7 @@
               <a:spcAft>
                 <a:spcPts val="800"/>
               </a:spcAft>
-              <a:defRPr sz="1400">
+              <a:defRPr sz="1300">
                 <a:solidFill>
                   <a:srgbClr val="F4F4F5"/>
                 </a:solidFill>
@@ -4878,7 +4880,7 @@
               <a:spcAft>
                 <a:spcPts val="800"/>
               </a:spcAft>
-              <a:defRPr sz="1400">
+              <a:defRPr sz="1300">
                 <a:solidFill>
                   <a:srgbClr val="F4F4F5"/>
                 </a:solidFill>
@@ -4893,7 +4895,7 @@
               <a:spcAft>
                 <a:spcPts val="800"/>
               </a:spcAft>
-              <a:defRPr sz="1400">
+              <a:defRPr sz="1300">
                 <a:solidFill>
                   <a:srgbClr val="F4F4F5"/>
                 </a:solidFill>
@@ -4908,7 +4910,7 @@
               <a:spcAft>
                 <a:spcPts val="800"/>
               </a:spcAft>
-              <a:defRPr sz="1400">
+              <a:defRPr sz="1300">
                 <a:solidFill>
                   <a:srgbClr val="F4F4F5"/>
                 </a:solidFill>
@@ -4923,7 +4925,7 @@
               <a:spcAft>
                 <a:spcPts val="800"/>
               </a:spcAft>
-              <a:defRPr sz="1400">
+              <a:defRPr sz="1300">
                 <a:solidFill>
                   <a:srgbClr val="F4F4F5"/>
                 </a:solidFill>
@@ -4931,6 +4933,21 @@
             </a:pPr>
             <a:r>
               <a:t>•  Matches this project's earlier classifier result: 40% on the same cross-domain test</a:t>
+            </a:r>
+          </a:p>
+          <a:p>
+            <a:pPr>
+              <a:spcAft>
+                <a:spcPts val="800"/>
+              </a:spcAft>
+              <a:defRPr sz="1300">
+                <a:solidFill>
+                  <a:srgbClr val="F4F4F5"/>
+                </a:solidFill>
+              </a:defRPr>
+            </a:pPr>
+            <a:r>
+              <a:t>•  Contrast with next slide: same-domain fine-tuning tells a very different story</a:t>
             </a:r>
           </a:p>
         </p:txBody>
@@ -5027,7 +5044,7 @@
                 </a:solidFill>
                 <a:latin typeface="Calibri"/>
               </a:rPr>
-              <a:t>Discussion &amp; Limitations</a:t>
+              <a:t>Real-Data Fine-Tuning (PKLot)</a:t>
             </a:r>
           </a:p>
         </p:txBody>
@@ -5062,21 +5079,462 @@
                 </a:solidFill>
                 <a:latin typeface="Calibri"/>
               </a:rPr>
-              <a:t>Honest accounting</a:t>
-            </a:r>
-          </a:p>
-        </p:txBody>
-      </p:sp>
-      <p:sp>
-        <p:nvSpPr>
-          <p:cNvPr id="5" name="TextBox 4"/>
+              <a:t>Same-domain real photos — a very different result from zero-shot</a:t>
+            </a:r>
+          </a:p>
+        </p:txBody>
+      </p:sp>
+      <p:graphicFrame>
+        <p:nvGraphicFramePr>
+          <p:cNvPr id="5" name="Table 4"/>
+          <p:cNvGraphicFramePr>
+            <a:graphicFrameLocks noGrp="1"/>
+          </p:cNvGraphicFramePr>
+          <p:nvPr/>
+        </p:nvGraphicFramePr>
+        <p:xfrm>
+          <a:off x="548640" y="1645920"/>
+          <a:ext cx="5486400" cy="1737360"/>
+        </p:xfrm>
+        <a:graphic>
+          <a:graphicData uri="http://schemas.openxmlformats.org/drawingml/2006/table">
+            <a:tbl>
+              <a:tblPr firstRow="1" bandRow="1">
+                <a:tableStyleId>{5C22544A-7EE6-4342-B048-85BDC9FD1C3A}</a:tableStyleId>
+              </a:tblPr>
+              <a:tblGrid>
+                <a:gridCol w="1097280"/>
+                <a:gridCol w="1097280"/>
+                <a:gridCol w="1097280"/>
+                <a:gridCol w="1097280"/>
+                <a:gridCol w="1097280"/>
+              </a:tblGrid>
+              <a:tr h="434340">
+                <a:tc>
+                  <a:txBody>
+                    <a:bodyPr/>
+                    <a:lstStyle/>
+                    <a:p>
+                      <a:pPr>
+                        <a:defRPr b="1" sz="1200"/>
+                      </a:pPr>
+                      <a:r>
+                        <a:t>Class</a:t>
+                      </a:r>
+                    </a:p>
+                  </a:txBody>
+                  <a:tcPr>
+                    <a:solidFill>
+                      <a:srgbClr val="333842"/>
+                    </a:solidFill>
+                  </a:tcPr>
+                </a:tc>
+                <a:tc>
+                  <a:txBody>
+                    <a:bodyPr/>
+                    <a:lstStyle/>
+                    <a:p>
+                      <a:pPr>
+                        <a:defRPr b="1" sz="1200"/>
+                      </a:pPr>
+                      <a:r>
+                        <a:t>GT</a:t>
+                      </a:r>
+                    </a:p>
+                  </a:txBody>
+                  <a:tcPr>
+                    <a:solidFill>
+                      <a:srgbClr val="333842"/>
+                    </a:solidFill>
+                  </a:tcPr>
+                </a:tc>
+                <a:tc>
+                  <a:txBody>
+                    <a:bodyPr/>
+                    <a:lstStyle/>
+                    <a:p>
+                      <a:pPr>
+                        <a:defRPr b="1" sz="1200"/>
+                      </a:pPr>
+                      <a:r>
+                        <a:t>AP@0.5</a:t>
+                      </a:r>
+                    </a:p>
+                  </a:txBody>
+                  <a:tcPr>
+                    <a:solidFill>
+                      <a:srgbClr val="333842"/>
+                    </a:solidFill>
+                  </a:tcPr>
+                </a:tc>
+                <a:tc>
+                  <a:txBody>
+                    <a:bodyPr/>
+                    <a:lstStyle/>
+                    <a:p>
+                      <a:pPr>
+                        <a:defRPr b="1" sz="1200"/>
+                      </a:pPr>
+                      <a:r>
+                        <a:t>Precision</a:t>
+                      </a:r>
+                    </a:p>
+                  </a:txBody>
+                  <a:tcPr>
+                    <a:solidFill>
+                      <a:srgbClr val="333842"/>
+                    </a:solidFill>
+                  </a:tcPr>
+                </a:tc>
+                <a:tc>
+                  <a:txBody>
+                    <a:bodyPr/>
+                    <a:lstStyle/>
+                    <a:p>
+                      <a:pPr>
+                        <a:defRPr b="1" sz="1200"/>
+                      </a:pPr>
+                      <a:r>
+                        <a:t>Recall</a:t>
+                      </a:r>
+                    </a:p>
+                  </a:txBody>
+                  <a:tcPr>
+                    <a:solidFill>
+                      <a:srgbClr val="333842"/>
+                    </a:solidFill>
+                  </a:tcPr>
+                </a:tc>
+              </a:tr>
+              <a:tr h="434340">
+                <a:tc>
+                  <a:txBody>
+                    <a:bodyPr/>
+                    <a:lstStyle/>
+                    <a:p>
+                      <a:pPr>
+                        <a:defRPr sz="1200"/>
+                      </a:pPr>
+                      <a:r>
+                        <a:t>empty_spot</a:t>
+                      </a:r>
+                    </a:p>
+                  </a:txBody>
+                  <a:tcPr>
+                    <a:solidFill>
+                      <a:srgbClr val="24282F"/>
+                    </a:solidFill>
+                  </a:tcPr>
+                </a:tc>
+                <a:tc>
+                  <a:txBody>
+                    <a:bodyPr/>
+                    <a:lstStyle/>
+                    <a:p>
+                      <a:pPr>
+                        <a:defRPr sz="1200"/>
+                      </a:pPr>
+                      <a:r>
+                        <a:t>5,345</a:t>
+                      </a:r>
+                    </a:p>
+                  </a:txBody>
+                  <a:tcPr>
+                    <a:solidFill>
+                      <a:srgbClr val="24282F"/>
+                    </a:solidFill>
+                  </a:tcPr>
+                </a:tc>
+                <a:tc>
+                  <a:txBody>
+                    <a:bodyPr/>
+                    <a:lstStyle/>
+                    <a:p>
+                      <a:pPr>
+                        <a:defRPr sz="1200"/>
+                      </a:pPr>
+                      <a:r>
+                        <a:t>46.84%</a:t>
+                      </a:r>
+                    </a:p>
+                  </a:txBody>
+                  <a:tcPr>
+                    <a:solidFill>
+                      <a:srgbClr val="24282F"/>
+                    </a:solidFill>
+                  </a:tcPr>
+                </a:tc>
+                <a:tc>
+                  <a:txBody>
+                    <a:bodyPr/>
+                    <a:lstStyle/>
+                    <a:p>
+                      <a:pPr>
+                        <a:defRPr sz="1200"/>
+                      </a:pPr>
+                      <a:r>
+                        <a:t>77.6%</a:t>
+                      </a:r>
+                    </a:p>
+                  </a:txBody>
+                  <a:tcPr>
+                    <a:solidFill>
+                      <a:srgbClr val="24282F"/>
+                    </a:solidFill>
+                  </a:tcPr>
+                </a:tc>
+                <a:tc>
+                  <a:txBody>
+                    <a:bodyPr/>
+                    <a:lstStyle/>
+                    <a:p>
+                      <a:pPr>
+                        <a:defRPr sz="1200"/>
+                      </a:pPr>
+                      <a:r>
+                        <a:t>53.2%</a:t>
+                      </a:r>
+                    </a:p>
+                  </a:txBody>
+                  <a:tcPr>
+                    <a:solidFill>
+                      <a:srgbClr val="24282F"/>
+                    </a:solidFill>
+                  </a:tcPr>
+                </a:tc>
+              </a:tr>
+              <a:tr h="434340">
+                <a:tc>
+                  <a:txBody>
+                    <a:bodyPr/>
+                    <a:lstStyle/>
+                    <a:p>
+                      <a:pPr>
+                        <a:defRPr sz="1200"/>
+                      </a:pPr>
+                      <a:r>
+                        <a:t>occupied_spot</a:t>
+                      </a:r>
+                    </a:p>
+                  </a:txBody>
+                  <a:tcPr>
+                    <a:solidFill>
+                      <a:srgbClr val="24282F"/>
+                    </a:solidFill>
+                  </a:tcPr>
+                </a:tc>
+                <a:tc>
+                  <a:txBody>
+                    <a:bodyPr/>
+                    <a:lstStyle/>
+                    <a:p>
+                      <a:pPr>
+                        <a:defRPr sz="1200"/>
+                      </a:pPr>
+                      <a:r>
+                        <a:t>4,975</a:t>
+                      </a:r>
+                    </a:p>
+                  </a:txBody>
+                  <a:tcPr>
+                    <a:solidFill>
+                      <a:srgbClr val="24282F"/>
+                    </a:solidFill>
+                  </a:tcPr>
+                </a:tc>
+                <a:tc>
+                  <a:txBody>
+                    <a:bodyPr/>
+                    <a:lstStyle/>
+                    <a:p>
+                      <a:pPr>
+                        <a:defRPr sz="1200"/>
+                      </a:pPr>
+                      <a:r>
+                        <a:t>48.59%</a:t>
+                      </a:r>
+                    </a:p>
+                  </a:txBody>
+                  <a:tcPr>
+                    <a:solidFill>
+                      <a:srgbClr val="24282F"/>
+                    </a:solidFill>
+                  </a:tcPr>
+                </a:tc>
+                <a:tc>
+                  <a:txBody>
+                    <a:bodyPr/>
+                    <a:lstStyle/>
+                    <a:p>
+                      <a:pPr>
+                        <a:defRPr sz="1200"/>
+                      </a:pPr>
+                      <a:r>
+                        <a:t>72.6%</a:t>
+                      </a:r>
+                    </a:p>
+                  </a:txBody>
+                  <a:tcPr>
+                    <a:solidFill>
+                      <a:srgbClr val="24282F"/>
+                    </a:solidFill>
+                  </a:tcPr>
+                </a:tc>
+                <a:tc>
+                  <a:txBody>
+                    <a:bodyPr/>
+                    <a:lstStyle/>
+                    <a:p>
+                      <a:pPr>
+                        <a:defRPr sz="1200"/>
+                      </a:pPr>
+                      <a:r>
+                        <a:t>57.1%</a:t>
+                      </a:r>
+                    </a:p>
+                  </a:txBody>
+                  <a:tcPr>
+                    <a:solidFill>
+                      <a:srgbClr val="24282F"/>
+                    </a:solidFill>
+                  </a:tcPr>
+                </a:tc>
+              </a:tr>
+              <a:tr h="434340">
+                <a:tc>
+                  <a:txBody>
+                    <a:bodyPr/>
+                    <a:lstStyle/>
+                    <a:p>
+                      <a:pPr>
+                        <a:defRPr sz="1200"/>
+                      </a:pPr>
+                      <a:r>
+                        <a:t>mAP@0.5</a:t>
+                      </a:r>
+                    </a:p>
+                  </a:txBody>
+                  <a:tcPr>
+                    <a:solidFill>
+                      <a:srgbClr val="24282F"/>
+                    </a:solidFill>
+                  </a:tcPr>
+                </a:tc>
+                <a:tc>
+                  <a:txBody>
+                    <a:bodyPr/>
+                    <a:lstStyle/>
+                    <a:p>
+                      <a:pPr>
+                        <a:defRPr sz="1200"/>
+                      </a:pPr>
+                      <a:r>
+                        <a:t>—</a:t>
+                      </a:r>
+                    </a:p>
+                  </a:txBody>
+                  <a:tcPr>
+                    <a:solidFill>
+                      <a:srgbClr val="24282F"/>
+                    </a:solidFill>
+                  </a:tcPr>
+                </a:tc>
+                <a:tc>
+                  <a:txBody>
+                    <a:bodyPr/>
+                    <a:lstStyle/>
+                    <a:p>
+                      <a:pPr>
+                        <a:defRPr sz="1200"/>
+                      </a:pPr>
+                      <a:r>
+                        <a:t>47.71%</a:t>
+                      </a:r>
+                    </a:p>
+                  </a:txBody>
+                  <a:tcPr>
+                    <a:solidFill>
+                      <a:srgbClr val="24282F"/>
+                    </a:solidFill>
+                  </a:tcPr>
+                </a:tc>
+                <a:tc>
+                  <a:txBody>
+                    <a:bodyPr/>
+                    <a:lstStyle/>
+                    <a:p>
+                      <a:pPr>
+                        <a:defRPr sz="1200"/>
+                      </a:pPr>
+                      <a:r>
+                        <a:t>—</a:t>
+                      </a:r>
+                    </a:p>
+                  </a:txBody>
+                  <a:tcPr>
+                    <a:solidFill>
+                      <a:srgbClr val="24282F"/>
+                    </a:solidFill>
+                  </a:tcPr>
+                </a:tc>
+                <a:tc>
+                  <a:txBody>
+                    <a:bodyPr/>
+                    <a:lstStyle/>
+                    <a:p>
+                      <a:pPr>
+                        <a:defRPr sz="1200"/>
+                      </a:pPr>
+                      <a:r>
+                        <a:t>—</a:t>
+                      </a:r>
+                    </a:p>
+                  </a:txBody>
+                  <a:tcPr>
+                    <a:solidFill>
+                      <a:srgbClr val="24282F"/>
+                    </a:solidFill>
+                  </a:tcPr>
+                </a:tc>
+              </a:tr>
+            </a:tbl>
+          </a:graphicData>
+        </a:graphic>
+      </p:graphicFrame>
+      <p:pic>
+        <p:nvPicPr>
+          <p:cNvPr id="6" name="Picture 5" descr="confusion_matrix.png"/>
+          <p:cNvPicPr>
+            <a:picLocks noChangeAspect="1"/>
+          </p:cNvPicPr>
+          <p:nvPr/>
+        </p:nvPicPr>
+        <p:blipFill>
+          <a:blip r:embed="rId2"/>
+          <a:stretch>
+            <a:fillRect/>
+          </a:stretch>
+        </p:blipFill>
+        <p:spPr>
+          <a:xfrm>
+            <a:off x="6846570" y="1463040"/>
+            <a:ext cx="4320540" cy="3840480"/>
+          </a:xfrm>
+          <a:prstGeom prst="rect">
+            <a:avLst/>
+          </a:prstGeom>
+        </p:spPr>
+      </p:pic>
+      <p:sp>
+        <p:nvSpPr>
+          <p:cNvPr id="7" name="TextBox 6"/>
           <p:cNvSpPr txBox="1"/>
           <p:nvPr/>
         </p:nvSpPr>
         <p:spPr>
           <a:xfrm>
-            <a:off x="640080" y="1737360"/>
-            <a:ext cx="10698480" cy="4389120"/>
+            <a:off x="548640" y="3566160"/>
+            <a:ext cx="5486400" cy="2560320"/>
           </a:xfrm>
           <a:prstGeom prst="rect">
             <a:avLst/>
@@ -5089,63 +5547,15 @@
           </a:bodyPr>
           <a:lstStyle/>
           <a:p>
-            <a:pPr>
-              <a:spcAft>
-                <a:spcPts val="800"/>
-              </a:spcAft>
-              <a:defRPr sz="1700">
+            <a:pPr algn="l"/>
+            <a:r>
+              <a:rPr sz="1300" b="0">
                 <a:solidFill>
-                  <a:srgbClr val="F4F4F5"/>
+                  <a:srgbClr val="A1A1AA"/>
                 </a:solidFill>
-              </a:defRPr>
-            </a:pPr>
-            <a:r>
-              <a:t>•  Worked: staged synthetic-first build let the whole pipeline be validated cheaply before real data</a:t>
-            </a:r>
-          </a:p>
-          <a:p>
-            <a:pPr>
-              <a:spcAft>
-                <a:spcPts val="800"/>
-              </a:spcAft>
-              <a:defRPr sz="1700">
-                <a:solidFill>
-                  <a:srgbClr val="F4F4F5"/>
-                </a:solidFill>
-              </a:defRPr>
-            </a:pPr>
-            <a:r>
-              <a:t>•  Had to be revisited: the original classifier-only version didn't satisfy Object Detection — only caught by auditing against the rubric, requiring a genuine architecture change in Sprint 4</a:t>
-            </a:r>
-          </a:p>
-          <a:p>
-            <a:pPr>
-              <a:spcAft>
-                <a:spcPts val="800"/>
-              </a:spcAft>
-              <a:defRPr sz="1700">
-                <a:solidFill>
-                  <a:srgbClr val="F4F4F5"/>
-                </a:solidFill>
-              </a:defRPr>
-            </a:pPr>
-            <a:r>
-              <a:t>•  Tested on real photos (CNRPark-EXT): coarse signal transfers, precise localization does not — a real, measured domain gap, not an unexamined unknown</a:t>
-            </a:r>
-          </a:p>
-          <a:p>
-            <a:pPr>
-              <a:spcAft>
-                <a:spcPts val="800"/>
-              </a:spcAft>
-              <a:defRPr sz="1700">
-                <a:solidFill>
-                  <a:srgbClr val="F4F4F5"/>
-                </a:solidFill>
-              </a:defRPr>
-            </a:pPr>
-            <a:r>
-              <a:t>•  Low-contrast cars (e.g. gray-on-gray) are a concentrated failure mode, in both the new detector and the original classic-CV heuristic — the clear next target</a:t>
+                <a:latin typeface="Calibri"/>
+              </a:rPr>
+              <a:t>47.71% mAP on real, dense PKLot photos — a genuine result, far below synthetic (98.71%) but a huge step up from zero-shot (previous slide). Classification given correct localization: 94.5% (vs. 99.86% synthetic) — almost as reliable. The gap is recall: real lots average ~57 spots/image vs. ~15 synthetic, so the 16×16 grid drops 28.2% of real boxes to cell collisions. That alone caps achievable recall near ~72% — the concrete next fix is a finer grid or anchor-based head, not more real data.</a:t>
             </a:r>
           </a:p>
         </p:txBody>
@@ -5242,7 +5652,7 @@
                 </a:solidFill>
                 <a:latin typeface="Calibri"/>
               </a:rPr>
-              <a:t>Conclusion</a:t>
+              <a:t>Real-Data Fine-Tuning — Qualitative</a:t>
             </a:r>
           </a:p>
         </p:txBody>
@@ -5255,8 +5665,8 @@
         </p:nvSpPr>
         <p:spPr>
           <a:xfrm>
-            <a:off x="731520" y="2011680"/>
-            <a:ext cx="10698480" cy="3657600"/>
+            <a:off x="548640" y="960120"/>
+            <a:ext cx="10972800" cy="457200"/>
           </a:xfrm>
           <a:prstGeom prst="rect">
             <a:avLst/>
@@ -5271,17 +5681,41 @@
           <a:p>
             <a:pPr algn="l"/>
             <a:r>
-              <a:rPr sz="1900" b="0">
+              <a:rPr sz="1500" b="0">
                 <a:solidFill>
-                  <a:srgbClr val="F4F4F5"/>
+                  <a:srgbClr val="A1A1AA"/>
                 </a:solidFill>
                 <a:latin typeface="Calibri"/>
               </a:rPr>
-              <a:t>A from-scratch object detector for two classes (empty_spot / occupied_spot), 98.71% mAP@0.5, beating both a majority-class baseline (53.3%) and this project's own earlier classic-CV heuristic (82.7%). Served live through a REST API and browser demo, alongside a real-data-validated occupancy classifier for calibrated cameras. A real-photo test shows the next step clearly: fine-tune on the target camera's actual images before deployment.</a:t>
-            </a:r>
-          </a:p>
-        </p:txBody>
-      </p:sp>
+              <a:t>A dense, cluttered real PKLot photo</a:t>
+            </a:r>
+          </a:p>
+        </p:txBody>
+      </p:sp>
+      <p:pic>
+        <p:nvPicPr>
+          <p:cNvPr id="5" name="Picture 4" descr="sample_06.jpg"/>
+          <p:cNvPicPr>
+            <a:picLocks noChangeAspect="1"/>
+          </p:cNvPicPr>
+          <p:nvPr/>
+        </p:nvPicPr>
+        <p:blipFill>
+          <a:blip r:embed="rId2"/>
+          <a:stretch>
+            <a:fillRect/>
+          </a:stretch>
+        </p:blipFill>
+        <p:spPr>
+          <a:xfrm>
+            <a:off x="1772920" y="1554480"/>
+            <a:ext cx="8615680" cy="4846320"/>
+          </a:xfrm>
+          <a:prstGeom prst="rect">
+            <a:avLst/>
+          </a:prstGeom>
+        </p:spPr>
+      </p:pic>
     </p:spTree>
   </p:cSld>
   <p:clrMapOvr>
@@ -5291,6 +5725,353 @@
 </file>
 
 <file path=ppt/slides/slide17.xml><?xml version="1.0" encoding="utf-8"?>
+<p:sld xmlns:a="http://schemas.openxmlformats.org/drawingml/2006/main" xmlns:p="http://schemas.openxmlformats.org/presentationml/2006/main" xmlns:r="http://schemas.openxmlformats.org/officeDocument/2006/relationships">
+  <p:cSld>
+    <p:spTree>
+      <p:nvGrpSpPr>
+        <p:cNvPr id="1" name=""/>
+        <p:cNvGrpSpPr/>
+        <p:nvPr/>
+      </p:nvGrpSpPr>
+      <p:grpSpPr/>
+      <p:sp>
+        <p:nvSpPr>
+          <p:cNvPr id="2" name="Rectangle 1"/>
+          <p:cNvSpPr/>
+          <p:nvPr/>
+        </p:nvSpPr>
+        <p:spPr>
+          <a:xfrm>
+            <a:off x="0" y="0"/>
+            <a:ext cx="12188952" cy="6858000"/>
+          </a:xfrm>
+          <a:prstGeom prst="rect">
+            <a:avLst/>
+          </a:prstGeom>
+          <a:solidFill>
+            <a:srgbClr val="18181B"/>
+          </a:solidFill>
+          <a:ln>
+            <a:noFill/>
+          </a:ln>
+          <a:effectLst/>
+        </p:spPr>
+        <p:style>
+          <a:lnRef idx="1">
+            <a:schemeClr val="accent1"/>
+          </a:lnRef>
+          <a:fillRef idx="3">
+            <a:schemeClr val="accent1"/>
+          </a:fillRef>
+          <a:effectRef idx="2">
+            <a:schemeClr val="accent1"/>
+          </a:effectRef>
+          <a:fontRef idx="minor">
+            <a:schemeClr val="lt1"/>
+          </a:fontRef>
+        </p:style>
+        <p:txBody>
+          <a:bodyPr rtlCol="0" anchor="ctr"/>
+          <a:lstStyle/>
+          <a:p>
+            <a:pPr algn="ctr"/>
+          </a:p>
+        </p:txBody>
+      </p:sp>
+      <p:sp>
+        <p:nvSpPr>
+          <p:cNvPr id="3" name="TextBox 2"/>
+          <p:cNvSpPr txBox="1"/>
+          <p:nvPr/>
+        </p:nvSpPr>
+        <p:spPr>
+          <a:xfrm>
+            <a:off x="548640" y="320040"/>
+            <a:ext cx="10972800" cy="731520"/>
+          </a:xfrm>
+          <a:prstGeom prst="rect">
+            <a:avLst/>
+          </a:prstGeom>
+          <a:noFill/>
+        </p:spPr>
+        <p:txBody>
+          <a:bodyPr wrap="square">
+            <a:spAutoFit/>
+          </a:bodyPr>
+          <a:lstStyle/>
+          <a:p>
+            <a:pPr algn="l"/>
+            <a:r>
+              <a:rPr sz="3000" b="1">
+                <a:solidFill>
+                  <a:srgbClr val="6B8AFF"/>
+                </a:solidFill>
+                <a:latin typeface="Calibri"/>
+              </a:rPr>
+              <a:t>Discussion &amp; Limitations</a:t>
+            </a:r>
+          </a:p>
+        </p:txBody>
+      </p:sp>
+      <p:sp>
+        <p:nvSpPr>
+          <p:cNvPr id="4" name="TextBox 3"/>
+          <p:cNvSpPr txBox="1"/>
+          <p:nvPr/>
+        </p:nvSpPr>
+        <p:spPr>
+          <a:xfrm>
+            <a:off x="548640" y="960120"/>
+            <a:ext cx="10972800" cy="457200"/>
+          </a:xfrm>
+          <a:prstGeom prst="rect">
+            <a:avLst/>
+          </a:prstGeom>
+          <a:noFill/>
+        </p:spPr>
+        <p:txBody>
+          <a:bodyPr wrap="square">
+            <a:spAutoFit/>
+          </a:bodyPr>
+          <a:lstStyle/>
+          <a:p>
+            <a:pPr algn="l"/>
+            <a:r>
+              <a:rPr sz="1500" b="0">
+                <a:solidFill>
+                  <a:srgbClr val="A1A1AA"/>
+                </a:solidFill>
+                <a:latin typeface="Calibri"/>
+              </a:rPr>
+              <a:t>Honest accounting</a:t>
+            </a:r>
+          </a:p>
+        </p:txBody>
+      </p:sp>
+      <p:sp>
+        <p:nvSpPr>
+          <p:cNvPr id="5" name="TextBox 4"/>
+          <p:cNvSpPr txBox="1"/>
+          <p:nvPr/>
+        </p:nvSpPr>
+        <p:spPr>
+          <a:xfrm>
+            <a:off x="640080" y="1737360"/>
+            <a:ext cx="10698480" cy="4389120"/>
+          </a:xfrm>
+          <a:prstGeom prst="rect">
+            <a:avLst/>
+          </a:prstGeom>
+          <a:noFill/>
+        </p:spPr>
+        <p:txBody>
+          <a:bodyPr wrap="square">
+            <a:spAutoFit/>
+          </a:bodyPr>
+          <a:lstStyle/>
+          <a:p>
+            <a:pPr>
+              <a:spcAft>
+                <a:spcPts val="800"/>
+              </a:spcAft>
+              <a:defRPr sz="1700">
+                <a:solidFill>
+                  <a:srgbClr val="F4F4F5"/>
+                </a:solidFill>
+              </a:defRPr>
+            </a:pPr>
+            <a:r>
+              <a:t>•  Worked: staged synthetic-first build let the whole pipeline be validated cheaply before real data</a:t>
+            </a:r>
+          </a:p>
+          <a:p>
+            <a:pPr>
+              <a:spcAft>
+                <a:spcPts val="800"/>
+              </a:spcAft>
+              <a:defRPr sz="1700">
+                <a:solidFill>
+                  <a:srgbClr val="F4F4F5"/>
+                </a:solidFill>
+              </a:defRPr>
+            </a:pPr>
+            <a:r>
+              <a:t>•  Had to be revisited: the original classifier-only version didn't satisfy Object Detection — only caught by auditing against the rubric, requiring a genuine architecture change in Sprint 4</a:t>
+            </a:r>
+          </a:p>
+          <a:p>
+            <a:pPr>
+              <a:spcAft>
+                <a:spcPts val="800"/>
+              </a:spcAft>
+              <a:defRPr sz="1700">
+                <a:solidFill>
+                  <a:srgbClr val="F4F4F5"/>
+                </a:solidFill>
+              </a:defRPr>
+            </a:pPr>
+            <a:r>
+              <a:t>•  Zero-shot to an unfamiliar camera (CNRPark-EXT) mostly fails; fine-tuning on same-domain real data (PKLot) reaches 47.71% mAP — real data helps a lot, but the model needs to actually see it</a:t>
+            </a:r>
+          </a:p>
+          <a:p>
+            <a:pPr>
+              <a:spcAft>
+                <a:spcPts val="800"/>
+              </a:spcAft>
+              <a:defRPr sz="1700">
+                <a:solidFill>
+                  <a:srgbClr val="F4F4F5"/>
+                </a:solidFill>
+              </a:defRPr>
+            </a:pPr>
+            <a:r>
+              <a:t>•  The real-data bottleneck is recall from grid-cell collisions on dense lots, not classification — a specific, measured next fix, not a vague call for "more real data"</a:t>
+            </a:r>
+          </a:p>
+        </p:txBody>
+      </p:sp>
+    </p:spTree>
+  </p:cSld>
+  <p:clrMapOvr>
+    <a:masterClrMapping/>
+  </p:clrMapOvr>
+</p:sld>
+</file>
+
+<file path=ppt/slides/slide18.xml><?xml version="1.0" encoding="utf-8"?>
+<p:sld xmlns:a="http://schemas.openxmlformats.org/drawingml/2006/main" xmlns:p="http://schemas.openxmlformats.org/presentationml/2006/main" xmlns:r="http://schemas.openxmlformats.org/officeDocument/2006/relationships">
+  <p:cSld>
+    <p:spTree>
+      <p:nvGrpSpPr>
+        <p:cNvPr id="1" name=""/>
+        <p:cNvGrpSpPr/>
+        <p:nvPr/>
+      </p:nvGrpSpPr>
+      <p:grpSpPr/>
+      <p:sp>
+        <p:nvSpPr>
+          <p:cNvPr id="2" name="Rectangle 1"/>
+          <p:cNvSpPr/>
+          <p:nvPr/>
+        </p:nvSpPr>
+        <p:spPr>
+          <a:xfrm>
+            <a:off x="0" y="0"/>
+            <a:ext cx="12188952" cy="6858000"/>
+          </a:xfrm>
+          <a:prstGeom prst="rect">
+            <a:avLst/>
+          </a:prstGeom>
+          <a:solidFill>
+            <a:srgbClr val="18181B"/>
+          </a:solidFill>
+          <a:ln>
+            <a:noFill/>
+          </a:ln>
+          <a:effectLst/>
+        </p:spPr>
+        <p:style>
+          <a:lnRef idx="1">
+            <a:schemeClr val="accent1"/>
+          </a:lnRef>
+          <a:fillRef idx="3">
+            <a:schemeClr val="accent1"/>
+          </a:fillRef>
+          <a:effectRef idx="2">
+            <a:schemeClr val="accent1"/>
+          </a:effectRef>
+          <a:fontRef idx="minor">
+            <a:schemeClr val="lt1"/>
+          </a:fontRef>
+        </p:style>
+        <p:txBody>
+          <a:bodyPr rtlCol="0" anchor="ctr"/>
+          <a:lstStyle/>
+          <a:p>
+            <a:pPr algn="ctr"/>
+          </a:p>
+        </p:txBody>
+      </p:sp>
+      <p:sp>
+        <p:nvSpPr>
+          <p:cNvPr id="3" name="TextBox 2"/>
+          <p:cNvSpPr txBox="1"/>
+          <p:nvPr/>
+        </p:nvSpPr>
+        <p:spPr>
+          <a:xfrm>
+            <a:off x="548640" y="320040"/>
+            <a:ext cx="10972800" cy="731520"/>
+          </a:xfrm>
+          <a:prstGeom prst="rect">
+            <a:avLst/>
+          </a:prstGeom>
+          <a:noFill/>
+        </p:spPr>
+        <p:txBody>
+          <a:bodyPr wrap="square">
+            <a:spAutoFit/>
+          </a:bodyPr>
+          <a:lstStyle/>
+          <a:p>
+            <a:pPr algn="l"/>
+            <a:r>
+              <a:rPr sz="3000" b="1">
+                <a:solidFill>
+                  <a:srgbClr val="6B8AFF"/>
+                </a:solidFill>
+                <a:latin typeface="Calibri"/>
+              </a:rPr>
+              <a:t>Conclusion</a:t>
+            </a:r>
+          </a:p>
+        </p:txBody>
+      </p:sp>
+      <p:sp>
+        <p:nvSpPr>
+          <p:cNvPr id="4" name="TextBox 3"/>
+          <p:cNvSpPr txBox="1"/>
+          <p:nvPr/>
+        </p:nvSpPr>
+        <p:spPr>
+          <a:xfrm>
+            <a:off x="731520" y="1828800"/>
+            <a:ext cx="10698480" cy="4114800"/>
+          </a:xfrm>
+          <a:prstGeom prst="rect">
+            <a:avLst/>
+          </a:prstGeom>
+          <a:noFill/>
+        </p:spPr>
+        <p:txBody>
+          <a:bodyPr wrap="square">
+            <a:spAutoFit/>
+          </a:bodyPr>
+          <a:lstStyle/>
+          <a:p>
+            <a:pPr algn="l"/>
+            <a:r>
+              <a:rPr sz="1700" b="0">
+                <a:solidFill>
+                  <a:srgbClr val="F4F4F5"/>
+                </a:solidFill>
+                <a:latin typeface="Calibri"/>
+              </a:rPr>
+              <a:t>A from-scratch object detector for two classes (empty_spot / occupied_spot): 98.71% mAP@0.5 on synthetic data, and 47.71% mAP@0.5 after fine-tuning on real PKLot photos — beating both a majority-class baseline (53.3%) and this project's own earlier classic-CV heuristic (82.7%). Classification stays reliable on real data (94.5%, vs. 99.86% synthetic); the real-data gap is concentrated in localization recall on dense lots, with a specific, measured cause (grid-cell collisions) and a specific next fix (finer grid / anchor-based head). Served live through a REST API and browser demo, alongside a real-data-validated occupancy classifier (98.69%) for calibrated cameras.</a:t>
+            </a:r>
+          </a:p>
+        </p:txBody>
+      </p:sp>
+    </p:spTree>
+  </p:cSld>
+  <p:clrMapOvr>
+    <a:masterClrMapping/>
+  </p:clrMapOvr>
+</p:sld>
+</file>
+
+<file path=ppt/slides/slide19.xml><?xml version="1.0" encoding="utf-8"?>
 <p:sld xmlns:a="http://schemas.openxmlformats.org/drawingml/2006/main" xmlns:p="http://schemas.openxmlformats.org/presentationml/2006/main" xmlns:r="http://schemas.openxmlformats.org/officeDocument/2006/relationships">
   <p:cSld>
     <p:spTree>
@@ -6122,7 +6903,7 @@
                 </a:solidFill>
                 <a:latin typeface="Calibri"/>
               </a:rPr>
-              <a:t>4 real development stages, reconstructed from project file history</a:t>
+              <a:t>5 real development stages, reconstructed from project file history</a:t>
             </a:r>
           </a:p>
         </p:txBody>
@@ -6150,14 +6931,14 @@
                 <a:gridCol w="3688080"/>
                 <a:gridCol w="3688080"/>
               </a:tblGrid>
-              <a:tr h="475488">
-                <a:tc>
-                  <a:txBody>
-                    <a:bodyPr/>
-                    <a:lstStyle/>
-                    <a:p>
-                      <a:pPr>
-                        <a:defRPr b="1" sz="1300"/>
+              <a:tr h="396240">
+                <a:tc>
+                  <a:txBody>
+                    <a:bodyPr/>
+                    <a:lstStyle/>
+                    <a:p>
+                      <a:pPr>
+                        <a:defRPr b="1" sz="1200"/>
                       </a:pPr>
                       <a:r>
                         <a:t>Sprint</a:t>
@@ -6176,7 +6957,7 @@
                     <a:lstStyle/>
                     <a:p>
                       <a:pPr>
-                        <a:defRPr b="1" sz="1300"/>
+                        <a:defRPr b="1" sz="1200"/>
                       </a:pPr>
                       <a:r>
                         <a:t>Goal</a:t>
@@ -6195,7 +6976,7 @@
                     <a:lstStyle/>
                     <a:p>
                       <a:pPr>
-                        <a:defRPr b="1" sz="1300"/>
+                        <a:defRPr b="1" sz="1200"/>
                       </a:pPr>
                       <a:r>
                         <a:t>Key deliverables</a:t>
@@ -6209,14 +6990,14 @@
                   </a:tcPr>
                 </a:tc>
               </a:tr>
-              <a:tr h="475488">
-                <a:tc>
-                  <a:txBody>
-                    <a:bodyPr/>
-                    <a:lstStyle/>
-                    <a:p>
-                      <a:pPr>
-                        <a:defRPr sz="1300"/>
+              <a:tr h="396240">
+                <a:tc>
+                  <a:txBody>
+                    <a:bodyPr/>
+                    <a:lstStyle/>
+                    <a:p>
+                      <a:pPr>
+                        <a:defRPr sz="1200"/>
                       </a:pPr>
                       <a:r>
                         <a:t>1 (Jul 17)</a:t>
@@ -6235,7 +7016,7 @@
                     <a:lstStyle/>
                     <a:p>
                       <a:pPr>
-                        <a:defRPr sz="1300"/>
+                        <a:defRPr sz="1200"/>
                       </a:pPr>
                       <a:r>
                         <a:t>Pipeline scaffolding</a:t>
@@ -6254,7 +7035,7 @@
                     <a:lstStyle/>
                     <a:p>
                       <a:pPr>
-                        <a:defRPr sz="1300"/>
+                        <a:defRPr sz="1200"/>
                       </a:pPr>
                       <a:r>
                         <a:t>Synthetic data, CNN classifier, geometry check, first demo UI</a:t>
@@ -6268,14 +7049,14 @@
                   </a:tcPr>
                 </a:tc>
               </a:tr>
-              <a:tr h="475488">
-                <a:tc>
-                  <a:txBody>
-                    <a:bodyPr/>
-                    <a:lstStyle/>
-                    <a:p>
-                      <a:pPr>
-                        <a:defRPr sz="1300"/>
+              <a:tr h="396240">
+                <a:tc>
+                  <a:txBody>
+                    <a:bodyPr/>
+                    <a:lstStyle/>
+                    <a:p>
+                      <a:pPr>
+                        <a:defRPr sz="1200"/>
                       </a:pPr>
                       <a:r>
                         <a:t>2 (Jul 18)</a:t>
@@ -6294,7 +7075,7 @@
                     <a:lstStyle/>
                     <a:p>
                       <a:pPr>
-                        <a:defRPr sz="1300"/>
+                        <a:defRPr sz="1200"/>
                       </a:pPr>
                       <a:r>
                         <a:t>Real-data integration</a:t>
@@ -6313,7 +7094,7 @@
                     <a:lstStyle/>
                     <a:p>
                       <a:pPr>
-                        <a:defRPr sz="1300"/>
+                        <a:defRPr sz="1200"/>
                       </a:pPr>
                       <a:r>
                         <a:t>PKLot conversion, classifier retrained on real data (97.04%)</a:t>
@@ -6327,14 +7108,14 @@
                   </a:tcPr>
                 </a:tc>
               </a:tr>
-              <a:tr h="475488">
-                <a:tc>
-                  <a:txBody>
-                    <a:bodyPr/>
-                    <a:lstStyle/>
-                    <a:p>
-                      <a:pPr>
-                        <a:defRPr sz="1300"/>
+              <a:tr h="396240">
+                <a:tc>
+                  <a:txBody>
+                    <a:bodyPr/>
+                    <a:lstStyle/>
+                    <a:p>
+                      <a:pPr>
+                        <a:defRPr sz="1200"/>
                       </a:pPr>
                       <a:r>
                         <a:t>3 (Jul 19)</a:t>
@@ -6353,7 +7134,7 @@
                     <a:lstStyle/>
                     <a:p>
                       <a:pPr>
-                        <a:defRPr sz="1300"/>
+                        <a:defRPr sz="1200"/>
                       </a:pPr>
                       <a:r>
                         <a:t>Reporting</a:t>
@@ -6372,7 +7153,7 @@
                     <a:lstStyle/>
                     <a:p>
                       <a:pPr>
-                        <a:defRPr sz="1300"/>
+                        <a:defRPr sz="1200"/>
                       </a:pPr>
                       <a:r>
                         <a:t>Initial report/slides, architecture diagram</a:t>
@@ -6386,14 +7167,14 @@
                   </a:tcPr>
                 </a:tc>
               </a:tr>
-              <a:tr h="475488">
-                <a:tc>
-                  <a:txBody>
-                    <a:bodyPr/>
-                    <a:lstStyle/>
-                    <a:p>
-                      <a:pPr>
-                        <a:defRPr sz="1300"/>
+              <a:tr h="396240">
+                <a:tc>
+                  <a:txBody>
+                    <a:bodyPr/>
+                    <a:lstStyle/>
+                    <a:p>
+                      <a:pPr>
+                        <a:defRPr sz="1200"/>
                       </a:pPr>
                       <a:r>
                         <a:t>4 (Jul 20)</a:t>
@@ -6412,7 +7193,7 @@
                     <a:lstStyle/>
                     <a:p>
                       <a:pPr>
-                        <a:defRPr sz="1300"/>
+                        <a:defRPr sz="1200"/>
                       </a:pPr>
                       <a:r>
                         <a:t>Env fixes + OD pivot</a:t>
@@ -6431,10 +7212,69 @@
                     <a:lstStyle/>
                     <a:p>
                       <a:pPr>
-                        <a:defRPr sz="1300"/>
+                        <a:defRPr sz="1200"/>
                       </a:pPr>
                       <a:r>
                         <a:t>Rebuilt as a real 2-class object detector after rubric audit</a:t>
+                      </a:r>
+                    </a:p>
+                  </a:txBody>
+                  <a:tcPr>
+                    <a:solidFill>
+                      <a:srgbClr val="24282F"/>
+                    </a:solidFill>
+                  </a:tcPr>
+                </a:tc>
+              </a:tr>
+              <a:tr h="396240">
+                <a:tc>
+                  <a:txBody>
+                    <a:bodyPr/>
+                    <a:lstStyle/>
+                    <a:p>
+                      <a:pPr>
+                        <a:defRPr sz="1200"/>
+                      </a:pPr>
+                      <a:r>
+                        <a:t>5 (Jul 21)</a:t>
+                      </a:r>
+                    </a:p>
+                  </a:txBody>
+                  <a:tcPr>
+                    <a:solidFill>
+                      <a:srgbClr val="24282F"/>
+                    </a:solidFill>
+                  </a:tcPr>
+                </a:tc>
+                <a:tc>
+                  <a:txBody>
+                    <a:bodyPr/>
+                    <a:lstStyle/>
+                    <a:p>
+                      <a:pPr>
+                        <a:defRPr sz="1200"/>
+                      </a:pPr>
+                      <a:r>
+                        <a:t>Real-data closure</a:t>
+                      </a:r>
+                    </a:p>
+                  </a:txBody>
+                  <a:tcPr>
+                    <a:solidFill>
+                      <a:srgbClr val="24282F"/>
+                    </a:solidFill>
+                  </a:tcPr>
+                </a:tc>
+                <a:tc>
+                  <a:txBody>
+                    <a:bodyPr/>
+                    <a:lstStyle/>
+                    <a:p>
+                      <a:pPr>
+                        <a:defRPr sz="1200"/>
+                      </a:pPr>
+                      <a:r>
+                        <a:t>Fine-tuned detector on real boxes (47.71% mAP); classifier 98.69%</a:t>
                       </a:r>
                     </a:p>
                   </a:txBody>
